--- a/e61 Projects/Presentations/Discusant RBA Housing TTPI 2026.pptx
+++ b/e61 Projects/Presentations/Discusant RBA Housing TTPI 2026.pptx
@@ -20041,7 +20041,7 @@
           <a:bodyPr/>
           <a:lstStyle/>
           <a:p>
-            <a:endParaRPr lang="en-AU"/>
+            <a:endParaRPr lang="en-AU" dirty="0"/>
           </a:p>
         </p:txBody>
       </p:sp>
@@ -20066,7 +20066,7 @@
           <a:bodyPr/>
           <a:lstStyle/>
           <a:p>
-            <a:endParaRPr lang="en-AU"/>
+            <a:endParaRPr lang="en-AU" dirty="0"/>
           </a:p>
         </p:txBody>
       </p:sp>
@@ -20091,7 +20091,7 @@
           <a:bodyPr/>
           <a:lstStyle/>
           <a:p>
-            <a:endParaRPr lang="en-AU"/>
+            <a:endParaRPr lang="en-AU" dirty="0"/>
           </a:p>
         </p:txBody>
       </p:sp>
@@ -20116,7 +20116,7 @@
           <a:bodyPr/>
           <a:lstStyle/>
           <a:p>
-            <a:endParaRPr lang="en-AU"/>
+            <a:endParaRPr lang="en-AU" dirty="0"/>
           </a:p>
         </p:txBody>
       </p:sp>
@@ -20584,7 +20584,7 @@
                                           </p:stCondLst>
                                         </p:cTn>
                                         <p:tgtEl>
-                                          <p:spTgt spid="10"/>
+                                          <p:spTgt spid="8"/>
                                         </p:tgtEl>
                                         <p:attrNameLst>
                                           <p:attrName>style.visibility</p:attrName>
@@ -20629,7 +20629,7 @@
                                           </p:stCondLst>
                                         </p:cTn>
                                         <p:tgtEl>
-                                          <p:spTgt spid="8"/>
+                                          <p:spTgt spid="10"/>
                                         </p:tgtEl>
                                         <p:attrNameLst>
                                           <p:attrName>style.visibility</p:attrName>
@@ -21112,6 +21112,268 @@
   <p:clrMapOvr>
     <a:masterClrMapping/>
   </p:clrMapOvr>
+  <p:timing>
+    <p:tnLst>
+      <p:par>
+        <p:cTn id="1" dur="indefinite" restart="never" nodeType="tmRoot">
+          <p:childTnLst>
+            <p:seq concurrent="1" nextAc="seek">
+              <p:cTn id="2" dur="indefinite" nodeType="mainSeq">
+                <p:childTnLst>
+                  <p:par>
+                    <p:cTn id="3" fill="hold">
+                      <p:stCondLst>
+                        <p:cond delay="indefinite"/>
+                      </p:stCondLst>
+                      <p:childTnLst>
+                        <p:par>
+                          <p:cTn id="4" fill="hold">
+                            <p:stCondLst>
+                              <p:cond delay="0"/>
+                            </p:stCondLst>
+                            <p:childTnLst>
+                              <p:par>
+                                <p:cTn id="5" presetID="1" presetClass="entr" presetSubtype="0" fill="hold" grpId="0" nodeType="clickEffect">
+                                  <p:stCondLst>
+                                    <p:cond delay="0"/>
+                                  </p:stCondLst>
+                                  <p:childTnLst>
+                                    <p:set>
+                                      <p:cBhvr>
+                                        <p:cTn id="6" dur="1" fill="hold">
+                                          <p:stCondLst>
+                                            <p:cond delay="0"/>
+                                          </p:stCondLst>
+                                        </p:cTn>
+                                        <p:tgtEl>
+                                          <p:spTgt spid="7"/>
+                                        </p:tgtEl>
+                                        <p:attrNameLst>
+                                          <p:attrName>style.visibility</p:attrName>
+                                        </p:attrNameLst>
+                                      </p:cBhvr>
+                                      <p:to>
+                                        <p:strVal val="visible"/>
+                                      </p:to>
+                                    </p:set>
+                                  </p:childTnLst>
+                                </p:cTn>
+                              </p:par>
+                            </p:childTnLst>
+                          </p:cTn>
+                        </p:par>
+                      </p:childTnLst>
+                    </p:cTn>
+                  </p:par>
+                  <p:par>
+                    <p:cTn id="7" fill="hold">
+                      <p:stCondLst>
+                        <p:cond delay="indefinite"/>
+                      </p:stCondLst>
+                      <p:childTnLst>
+                        <p:par>
+                          <p:cTn id="8" fill="hold">
+                            <p:stCondLst>
+                              <p:cond delay="0"/>
+                            </p:stCondLst>
+                            <p:childTnLst>
+                              <p:par>
+                                <p:cTn id="9" presetID="1" presetClass="entr" presetSubtype="0" fill="hold" grpId="0" nodeType="clickEffect">
+                                  <p:stCondLst>
+                                    <p:cond delay="0"/>
+                                  </p:stCondLst>
+                                  <p:childTnLst>
+                                    <p:set>
+                                      <p:cBhvr>
+                                        <p:cTn id="10" dur="1" fill="hold">
+                                          <p:stCondLst>
+                                            <p:cond delay="0"/>
+                                          </p:stCondLst>
+                                        </p:cTn>
+                                        <p:tgtEl>
+                                          <p:spTgt spid="9"/>
+                                        </p:tgtEl>
+                                        <p:attrNameLst>
+                                          <p:attrName>style.visibility</p:attrName>
+                                        </p:attrNameLst>
+                                      </p:cBhvr>
+                                      <p:to>
+                                        <p:strVal val="visible"/>
+                                      </p:to>
+                                    </p:set>
+                                  </p:childTnLst>
+                                </p:cTn>
+                              </p:par>
+                            </p:childTnLst>
+                          </p:cTn>
+                        </p:par>
+                      </p:childTnLst>
+                    </p:cTn>
+                  </p:par>
+                  <p:par>
+                    <p:cTn id="11" fill="hold">
+                      <p:stCondLst>
+                        <p:cond delay="indefinite"/>
+                      </p:stCondLst>
+                      <p:childTnLst>
+                        <p:par>
+                          <p:cTn id="12" fill="hold">
+                            <p:stCondLst>
+                              <p:cond delay="0"/>
+                            </p:stCondLst>
+                            <p:childTnLst>
+                              <p:par>
+                                <p:cTn id="13" presetID="1" presetClass="entr" presetSubtype="0" fill="hold" grpId="0" nodeType="clickEffect">
+                                  <p:stCondLst>
+                                    <p:cond delay="0"/>
+                                  </p:stCondLst>
+                                  <p:childTnLst>
+                                    <p:set>
+                                      <p:cBhvr>
+                                        <p:cTn id="14" dur="1" fill="hold">
+                                          <p:stCondLst>
+                                            <p:cond delay="0"/>
+                                          </p:stCondLst>
+                                        </p:cTn>
+                                        <p:tgtEl>
+                                          <p:spTgt spid="11"/>
+                                        </p:tgtEl>
+                                        <p:attrNameLst>
+                                          <p:attrName>style.visibility</p:attrName>
+                                        </p:attrNameLst>
+                                      </p:cBhvr>
+                                      <p:to>
+                                        <p:strVal val="visible"/>
+                                      </p:to>
+                                    </p:set>
+                                  </p:childTnLst>
+                                </p:cTn>
+                              </p:par>
+                            </p:childTnLst>
+                          </p:cTn>
+                        </p:par>
+                      </p:childTnLst>
+                    </p:cTn>
+                  </p:par>
+                  <p:par>
+                    <p:cTn id="15" fill="hold">
+                      <p:stCondLst>
+                        <p:cond delay="indefinite"/>
+                      </p:stCondLst>
+                      <p:childTnLst>
+                        <p:par>
+                          <p:cTn id="16" fill="hold">
+                            <p:stCondLst>
+                              <p:cond delay="0"/>
+                            </p:stCondLst>
+                            <p:childTnLst>
+                              <p:par>
+                                <p:cTn id="17" presetID="1" presetClass="entr" presetSubtype="0" fill="hold" grpId="0" nodeType="clickEffect">
+                                  <p:stCondLst>
+                                    <p:cond delay="0"/>
+                                  </p:stCondLst>
+                                  <p:childTnLst>
+                                    <p:set>
+                                      <p:cBhvr>
+                                        <p:cTn id="18" dur="1" fill="hold">
+                                          <p:stCondLst>
+                                            <p:cond delay="0"/>
+                                          </p:stCondLst>
+                                        </p:cTn>
+                                        <p:tgtEl>
+                                          <p:spTgt spid="13"/>
+                                        </p:tgtEl>
+                                        <p:attrNameLst>
+                                          <p:attrName>style.visibility</p:attrName>
+                                        </p:attrNameLst>
+                                      </p:cBhvr>
+                                      <p:to>
+                                        <p:strVal val="visible"/>
+                                      </p:to>
+                                    </p:set>
+                                  </p:childTnLst>
+                                </p:cTn>
+                              </p:par>
+                            </p:childTnLst>
+                          </p:cTn>
+                        </p:par>
+                      </p:childTnLst>
+                    </p:cTn>
+                  </p:par>
+                  <p:par>
+                    <p:cTn id="19" fill="hold">
+                      <p:stCondLst>
+                        <p:cond delay="indefinite"/>
+                      </p:stCondLst>
+                      <p:childTnLst>
+                        <p:par>
+                          <p:cTn id="20" fill="hold">
+                            <p:stCondLst>
+                              <p:cond delay="0"/>
+                            </p:stCondLst>
+                            <p:childTnLst>
+                              <p:par>
+                                <p:cTn id="21" presetID="1" presetClass="entr" presetSubtype="0" fill="hold" grpId="0" nodeType="clickEffect">
+                                  <p:stCondLst>
+                                    <p:cond delay="0"/>
+                                  </p:stCondLst>
+                                  <p:childTnLst>
+                                    <p:set>
+                                      <p:cBhvr>
+                                        <p:cTn id="22" dur="1" fill="hold">
+                                          <p:stCondLst>
+                                            <p:cond delay="0"/>
+                                          </p:stCondLst>
+                                        </p:cTn>
+                                        <p:tgtEl>
+                                          <p:spTgt spid="17"/>
+                                        </p:tgtEl>
+                                        <p:attrNameLst>
+                                          <p:attrName>style.visibility</p:attrName>
+                                        </p:attrNameLst>
+                                      </p:cBhvr>
+                                      <p:to>
+                                        <p:strVal val="visible"/>
+                                      </p:to>
+                                    </p:set>
+                                  </p:childTnLst>
+                                </p:cTn>
+                              </p:par>
+                            </p:childTnLst>
+                          </p:cTn>
+                        </p:par>
+                      </p:childTnLst>
+                    </p:cTn>
+                  </p:par>
+                </p:childTnLst>
+              </p:cTn>
+              <p:prevCondLst>
+                <p:cond evt="onPrev" delay="0">
+                  <p:tgtEl>
+                    <p:sldTgt/>
+                  </p:tgtEl>
+                </p:cond>
+              </p:prevCondLst>
+              <p:nextCondLst>
+                <p:cond evt="onNext" delay="0">
+                  <p:tgtEl>
+                    <p:sldTgt/>
+                  </p:tgtEl>
+                </p:cond>
+              </p:nextCondLst>
+            </p:seq>
+          </p:childTnLst>
+        </p:cTn>
+      </p:par>
+    </p:tnLst>
+    <p:bldLst>
+      <p:bldP spid="7" grpId="0"/>
+      <p:bldP spid="9" grpId="0"/>
+      <p:bldP spid="11" grpId="0"/>
+      <p:bldP spid="13" grpId="0"/>
+      <p:bldP spid="17" grpId="0"/>
+    </p:bldLst>
+  </p:timing>
 </p:sld>
 </file>
 
@@ -21487,7 +21749,7 @@
         </p:blipFill>
         <p:spPr>
           <a:xfrm>
-            <a:off x="5876544" y="2719916"/>
+            <a:off x="5795802" y="2829562"/>
             <a:ext cx="5151120" cy="3571444"/>
           </a:xfrm>
           <a:prstGeom prst="rect">
@@ -24606,15 +24868,6 @@
 </file>
 
 <file path=customXml/item2.xml><?xml version="1.0" encoding="utf-8"?>
-<?mso-contentType ?>
-<FormTemplates xmlns="http://schemas.microsoft.com/sharepoint/v3/contenttype/forms">
-  <Display>DocumentLibraryForm</Display>
-  <Edit>DocumentLibraryForm</Edit>
-  <New>DocumentLibraryForm</New>
-</FormTemplates>
-</file>
-
-<file path=customXml/item3.xml><?xml version="1.0" encoding="utf-8"?>
 <p:properties xmlns:p="http://schemas.microsoft.com/office/2006/metadata/properties" xmlns:xsi="http://www.w3.org/2001/XMLSchema-instance" xmlns:pc="http://schemas.microsoft.com/office/infopath/2007/PartnerControls">
   <documentManagement>
     <TaxCatchAll xmlns="d4025935-85eb-43e8-ab32-734675053e7f" xsi:nil="true"/>
@@ -24623,6 +24876,15 @@
     </lcf76f155ced4ddcb4097134ff3c332f>
   </documentManagement>
 </p:properties>
+</file>
+
+<file path=customXml/item3.xml><?xml version="1.0" encoding="utf-8"?>
+<?mso-contentType ?>
+<FormTemplates xmlns="http://schemas.microsoft.com/sharepoint/v3/contenttype/forms">
+  <Display>DocumentLibraryForm</Display>
+  <Edit>DocumentLibraryForm</Edit>
+  <New>DocumentLibraryForm</New>
+</FormTemplates>
 </file>
 
 <file path=customXml/itemProps1.xml><?xml version="1.0" encoding="utf-8"?>
@@ -24645,14 +24907,6 @@
 </file>
 
 <file path=customXml/itemProps2.xml><?xml version="1.0" encoding="utf-8"?>
-<ds:datastoreItem xmlns:ds="http://schemas.openxmlformats.org/officeDocument/2006/customXml" ds:itemID="{529E81E1-445C-4E91-8E35-C5BD736A3B77}">
-  <ds:schemaRefs>
-    <ds:schemaRef ds:uri="http://schemas.microsoft.com/sharepoint/v3/contenttype/forms"/>
-  </ds:schemaRefs>
-</ds:datastoreItem>
-</file>
-
-<file path=customXml/itemProps3.xml><?xml version="1.0" encoding="utf-8"?>
 <ds:datastoreItem xmlns:ds="http://schemas.openxmlformats.org/officeDocument/2006/customXml" ds:itemID="{8E36B762-179B-48EA-90B2-E74079BA15DE}">
   <ds:schemaRefs>
     <ds:schemaRef ds:uri="http://schemas.microsoft.com/office/2006/documentManagement/types"/>
@@ -24667,4 +24921,12 @@
     <ds:schemaRef ds:uri="http://purl.org/dc/dcmitype/"/>
   </ds:schemaRefs>
 </ds:datastoreItem>
+</file>
+
+<file path=customXml/itemProps3.xml><?xml version="1.0" encoding="utf-8"?>
+<ds:datastoreItem xmlns:ds="http://schemas.openxmlformats.org/officeDocument/2006/customXml" ds:itemID="{529E81E1-445C-4E91-8E35-C5BD736A3B77}">
+  <ds:schemaRefs>
+    <ds:schemaRef ds:uri="http://schemas.microsoft.com/sharepoint/v3/contenttype/forms"/>
+  </ds:schemaRefs>
+</ds:datastoreItem>
 </file>
--- a/e61 Projects/Presentations/Discusant RBA Housing TTPI 2026.pptx
+++ b/e61 Projects/Presentations/Discusant RBA Housing TTPI 2026.pptx
@@ -245,7 +245,7 @@
           <a:p>
             <a:fld id="{60F87968-E7C3-4FA2-86D7-7CFDDCA2896A}" type="datetimeFigureOut">
               <a:rPr lang="en-US" smtClean="0"/>
-              <a:t>27-Jul-26</a:t>
+              <a:t>7/28/2026</a:t>
             </a:fld>
             <a:endParaRPr lang="en-US"/>
           </a:p>
@@ -422,7 +422,7 @@
           <a:p>
             <a:fld id="{B416A7BE-E113-476D-8DE0-A6138461ACE1}" type="datetimeFigureOut">
               <a:rPr lang="en-US" smtClean="0"/>
-              <a:t>27-Jul-26</a:t>
+              <a:t>7/28/2026</a:t>
             </a:fld>
             <a:endParaRPr lang="en-US"/>
           </a:p>
@@ -20091,32 +20091,10 @@
           <a:bodyPr/>
           <a:lstStyle/>
           <a:p>
-            <a:endParaRPr lang="en-AU" dirty="0"/>
-          </a:p>
-        </p:txBody>
-      </p:sp>
-      <p:sp>
-        <p:nvSpPr>
-          <p:cNvPr id="10" name="Text Placeholder 9">
-            <a:extLst>
-              <a:ext uri="{FF2B5EF4-FFF2-40B4-BE49-F238E27FC236}">
-                <a16:creationId xmlns:a16="http://schemas.microsoft.com/office/drawing/2014/main" id="{FA8EA512-8EB5-AB46-84BC-685DB8D2434F}"/>
-              </a:ext>
-            </a:extLst>
-          </p:cNvPr>
-          <p:cNvSpPr>
-            <a:spLocks noGrp="1"/>
-          </p:cNvSpPr>
-          <p:nvPr>
-            <p:ph type="body" sz="quarter" idx="13"/>
-          </p:nvPr>
-        </p:nvSpPr>
-        <p:spPr/>
-        <p:txBody>
-          <a:bodyPr/>
-          <a:lstStyle/>
-          <a:p>
-            <a:endParaRPr lang="en-AU" dirty="0"/>
+            <a:r>
+              <a:rPr lang="en-AU" dirty="0"/>
+              <a:t>30 July 2026</a:t>
+            </a:r>
           </a:p>
         </p:txBody>
       </p:sp>
@@ -20368,8 +20346,8 @@
         </p:nvSpPr>
         <p:spPr>
           <a:xfrm>
-            <a:off x="370417" y="1941083"/>
-            <a:ext cx="10576505" cy="2769989"/>
+            <a:off x="651155" y="2150214"/>
+            <a:ext cx="10576505" cy="2277547"/>
           </a:xfrm>
           <a:prstGeom prst="rect">
             <a:avLst/>
@@ -20390,7 +20368,13 @@
               <a:buChar char="•"/>
             </a:pPr>
             <a:r>
-              <a:rPr lang="en-AU" dirty="0"/>
+              <a:rPr lang="en-AU" sz="1600" dirty="0">
+                <a:solidFill>
+                  <a:schemeClr val="bg1">
+                    <a:lumMod val="50000"/>
+                  </a:schemeClr>
+                </a:solidFill>
+              </a:rPr>
               <a:t>Investors matter more than they used to (more of the population).</a:t>
             </a:r>
           </a:p>
@@ -20403,7 +20387,13 @@
               <a:buChar char="•"/>
             </a:pPr>
             <a:r>
-              <a:rPr lang="en-AU" dirty="0"/>
+              <a:rPr lang="en-AU" sz="1600" dirty="0">
+                <a:solidFill>
+                  <a:schemeClr val="bg1">
+                    <a:lumMod val="50000"/>
+                  </a:schemeClr>
+                </a:solidFill>
+              </a:rPr>
               <a:t>They own (slightly) more properties in a (slightly) more spread out set of regions.</a:t>
             </a:r>
           </a:p>
@@ -20416,7 +20406,13 @@
               <a:buChar char="•"/>
             </a:pPr>
             <a:r>
-              <a:rPr lang="en-AU" dirty="0"/>
+              <a:rPr lang="en-AU" sz="1600" dirty="0">
+                <a:solidFill>
+                  <a:schemeClr val="bg1">
+                    <a:lumMod val="50000"/>
+                  </a:schemeClr>
+                </a:solidFill>
+              </a:rPr>
               <a:t>Investors have higher taxable incomes.</a:t>
             </a:r>
           </a:p>
@@ -20429,7 +20425,13 @@
               <a:buChar char="•"/>
             </a:pPr>
             <a:r>
-              <a:rPr lang="en-AU" dirty="0"/>
+              <a:rPr lang="en-AU" sz="1600" dirty="0">
+                <a:solidFill>
+                  <a:schemeClr val="bg1">
+                    <a:lumMod val="50000"/>
+                  </a:schemeClr>
+                </a:solidFill>
+              </a:rPr>
               <a:t>The average investor has become older through time.</a:t>
             </a:r>
           </a:p>
@@ -20442,7 +20444,13 @@
               <a:buChar char="•"/>
             </a:pPr>
             <a:r>
-              <a:rPr lang="en-AU" dirty="0"/>
+              <a:rPr lang="en-AU" sz="1600" dirty="0">
+                <a:solidFill>
+                  <a:schemeClr val="bg1">
+                    <a:lumMod val="50000"/>
+                  </a:schemeClr>
+                </a:solidFill>
+              </a:rPr>
               <a:t>Negative gearing is popular, and its prevalence depends on underlying interest rates.</a:t>
             </a:r>
           </a:p>
@@ -20455,7 +20463,13 @@
               <a:buChar char="•"/>
             </a:pPr>
             <a:r>
-              <a:rPr lang="en-AU" dirty="0"/>
+              <a:rPr lang="en-AU" sz="1600" dirty="0">
+                <a:solidFill>
+                  <a:schemeClr val="bg1">
+                    <a:lumMod val="50000"/>
+                  </a:schemeClr>
+                </a:solidFill>
+              </a:rPr>
               <a:t>Housing investors are more highly leveraged – however, high DTI lending has declined significantly since 2022.</a:t>
             </a:r>
           </a:p>
@@ -20468,7 +20482,13 @@
               <a:buChar char="•"/>
             </a:pPr>
             <a:r>
-              <a:rPr lang="en-AU" dirty="0"/>
+              <a:rPr lang="en-AU" sz="1600" dirty="0">
+                <a:solidFill>
+                  <a:schemeClr val="bg1">
+                    <a:lumMod val="50000"/>
+                  </a:schemeClr>
+                </a:solidFill>
+              </a:rPr>
               <a:t>Debt increases with income while DTI declines.</a:t>
             </a:r>
           </a:p>
@@ -20488,7 +20508,7 @@
         </p:nvSpPr>
         <p:spPr>
           <a:xfrm>
-            <a:off x="362218" y="4923562"/>
+            <a:off x="362218" y="5046789"/>
             <a:ext cx="10977288" cy="1354217"/>
           </a:xfrm>
           <a:prstGeom prst="rect">
@@ -20929,7 +20949,15 @@
             </a:pPr>
             <a:r>
               <a:rPr lang="en-AU" dirty="0"/>
-              <a:t>Changes in the intergenerational share of wealth/income through housing (i.e. Varela, Breunig, and Smith [2025]; Siminski and Wilkins [2025]).</a:t>
+              <a:t>Changes in the </a:t>
+            </a:r>
+            <a:r>
+              <a:rPr lang="en-AU" b="1" dirty="0"/>
+              <a:t>intergenerational share</a:t>
+            </a:r>
+            <a:r>
+              <a:rPr lang="en-AU" dirty="0"/>
+              <a:t> of wealth/income through housing (i.e. Varela, Breunig, and Smith [2025]; Siminski and Wilkins [2025]).</a:t>
             </a:r>
           </a:p>
         </p:txBody>
@@ -20968,7 +20996,15 @@
             </a:pPr>
             <a:r>
               <a:rPr lang="en-AU" dirty="0"/>
-              <a:t>The magnitude of negative gearing, and the non-symmetric treatment of gains and expenses in the tax system (i.e. Dwyer and Garvin [2026], Gillitzer [2025]).</a:t>
+              <a:t>The magnitude of </a:t>
+            </a:r>
+            <a:r>
+              <a:rPr lang="en-AU" b="1" dirty="0"/>
+              <a:t>negative gearing</a:t>
+            </a:r>
+            <a:r>
+              <a:rPr lang="en-AU" dirty="0"/>
+              <a:t>, and the non-symmetric treatment of gains and expenses in the tax system (i.e. Dwyer and Garvin [2026], Gillitzer [2025]).</a:t>
             </a:r>
           </a:p>
         </p:txBody>
@@ -21007,7 +21043,15 @@
             </a:pPr>
             <a:r>
               <a:rPr lang="en-AU" dirty="0"/>
-              <a:t>How binding are macroprudential regulation (i.e. February introduction of DTI limits for the majority of new residential mortgage lending).</a:t>
+              <a:t>How binding are </a:t>
+            </a:r>
+            <a:r>
+              <a:rPr lang="en-AU" b="1" dirty="0"/>
+              <a:t>macroprudential regulation </a:t>
+            </a:r>
+            <a:r>
+              <a:rPr lang="en-AU" dirty="0"/>
+              <a:t>(i.e. February introduction of DTI limits for the majority of new residential mortgage lending).</a:t>
             </a:r>
           </a:p>
         </p:txBody>
@@ -24613,6 +24657,17 @@
 </file>
 
 <file path=customXml/item1.xml><?xml version="1.0" encoding="utf-8"?>
+<p:properties xmlns:p="http://schemas.microsoft.com/office/2006/metadata/properties" xmlns:xsi="http://www.w3.org/2001/XMLSchema-instance" xmlns:pc="http://schemas.microsoft.com/office/infopath/2007/PartnerControls">
+  <documentManagement>
+    <TaxCatchAll xmlns="d4025935-85eb-43e8-ab32-734675053e7f" xsi:nil="true"/>
+    <lcf76f155ced4ddcb4097134ff3c332f xmlns="aa802c90-64f7-4260-a678-c5c09559402a">
+      <Terms xmlns="http://schemas.microsoft.com/office/infopath/2007/PartnerControls"/>
+    </lcf76f155ced4ddcb4097134ff3c332f>
+  </documentManagement>
+</p:properties>
+</file>
+
+<file path=customXml/item2.xml><?xml version="1.0" encoding="utf-8"?>
 <ct:contentTypeSchema xmlns:ct="http://schemas.microsoft.com/office/2006/metadata/contentType" xmlns:ma="http://schemas.microsoft.com/office/2006/metadata/properties/metaAttributes" ct:_="" ma:_="" ma:contentTypeName="Document" ma:contentTypeID="0x010100E38A1619F266734FBC2B48FB95398739" ma:contentTypeVersion="18" ma:contentTypeDescription="Create a new document." ma:contentTypeScope="" ma:versionID="8dc4163b27f0ec44a22c6d7358323f5f">
   <xsd:schema xmlns:xsd="http://www.w3.org/2001/XMLSchema" xmlns:xs="http://www.w3.org/2001/XMLSchema" xmlns:p="http://schemas.microsoft.com/office/2006/metadata/properties" xmlns:ns2="aa802c90-64f7-4260-a678-c5c09559402a" xmlns:ns3="d4025935-85eb-43e8-ab32-734675053e7f" targetNamespace="http://schemas.microsoft.com/office/2006/metadata/properties" ma:root="true" ma:fieldsID="a1176a965c39d1ac1c7d6ef690b32559" ns2:_="" ns3:_="">
     <xsd:import namespace="aa802c90-64f7-4260-a678-c5c09559402a"/>
@@ -24867,17 +24922,6 @@
 </ct:contentTypeSchema>
 </file>
 
-<file path=customXml/item2.xml><?xml version="1.0" encoding="utf-8"?>
-<p:properties xmlns:p="http://schemas.microsoft.com/office/2006/metadata/properties" xmlns:xsi="http://www.w3.org/2001/XMLSchema-instance" xmlns:pc="http://schemas.microsoft.com/office/infopath/2007/PartnerControls">
-  <documentManagement>
-    <TaxCatchAll xmlns="d4025935-85eb-43e8-ab32-734675053e7f" xsi:nil="true"/>
-    <lcf76f155ced4ddcb4097134ff3c332f xmlns="aa802c90-64f7-4260-a678-c5c09559402a">
-      <Terms xmlns="http://schemas.microsoft.com/office/infopath/2007/PartnerControls"/>
-    </lcf76f155ced4ddcb4097134ff3c332f>
-  </documentManagement>
-</p:properties>
-</file>
-
 <file path=customXml/item3.xml><?xml version="1.0" encoding="utf-8"?>
 <?mso-contentType ?>
 <FormTemplates xmlns="http://schemas.microsoft.com/sharepoint/v3/contenttype/forms">
@@ -24888,6 +24932,23 @@
 </file>
 
 <file path=customXml/itemProps1.xml><?xml version="1.0" encoding="utf-8"?>
+<ds:datastoreItem xmlns:ds="http://schemas.openxmlformats.org/officeDocument/2006/customXml" ds:itemID="{8E36B762-179B-48EA-90B2-E74079BA15DE}">
+  <ds:schemaRefs>
+    <ds:schemaRef ds:uri="http://schemas.microsoft.com/office/2006/documentManagement/types"/>
+    <ds:schemaRef ds:uri="http://schemas.openxmlformats.org/package/2006/metadata/core-properties"/>
+    <ds:schemaRef ds:uri="http://purl.org/dc/terms/"/>
+    <ds:schemaRef ds:uri="aa802c90-64f7-4260-a678-c5c09559402a"/>
+    <ds:schemaRef ds:uri="http://purl.org/dc/elements/1.1/"/>
+    <ds:schemaRef ds:uri="http://schemas.microsoft.com/office/2006/metadata/properties"/>
+    <ds:schemaRef ds:uri="http://www.w3.org/XML/1998/namespace"/>
+    <ds:schemaRef ds:uri="http://schemas.microsoft.com/office/infopath/2007/PartnerControls"/>
+    <ds:schemaRef ds:uri="d4025935-85eb-43e8-ab32-734675053e7f"/>
+    <ds:schemaRef ds:uri="http://purl.org/dc/dcmitype/"/>
+  </ds:schemaRefs>
+</ds:datastoreItem>
+</file>
+
+<file path=customXml/itemProps2.xml><?xml version="1.0" encoding="utf-8"?>
 <ds:datastoreItem xmlns:ds="http://schemas.openxmlformats.org/officeDocument/2006/customXml" ds:itemID="{C54E5144-405F-49D2-89C0-6C01A508B471}">
   <ds:schemaRefs>
     <ds:schemaRef ds:uri="http://schemas.microsoft.com/office/2006/metadata/contentType"/>
@@ -24906,23 +24967,6 @@
 </ds:datastoreItem>
 </file>
 
-<file path=customXml/itemProps2.xml><?xml version="1.0" encoding="utf-8"?>
-<ds:datastoreItem xmlns:ds="http://schemas.openxmlformats.org/officeDocument/2006/customXml" ds:itemID="{8E36B762-179B-48EA-90B2-E74079BA15DE}">
-  <ds:schemaRefs>
-    <ds:schemaRef ds:uri="http://schemas.microsoft.com/office/2006/documentManagement/types"/>
-    <ds:schemaRef ds:uri="http://schemas.openxmlformats.org/package/2006/metadata/core-properties"/>
-    <ds:schemaRef ds:uri="http://purl.org/dc/terms/"/>
-    <ds:schemaRef ds:uri="aa802c90-64f7-4260-a678-c5c09559402a"/>
-    <ds:schemaRef ds:uri="http://purl.org/dc/elements/1.1/"/>
-    <ds:schemaRef ds:uri="http://schemas.microsoft.com/office/2006/metadata/properties"/>
-    <ds:schemaRef ds:uri="http://www.w3.org/XML/1998/namespace"/>
-    <ds:schemaRef ds:uri="http://schemas.microsoft.com/office/infopath/2007/PartnerControls"/>
-    <ds:schemaRef ds:uri="d4025935-85eb-43e8-ab32-734675053e7f"/>
-    <ds:schemaRef ds:uri="http://purl.org/dc/dcmitype/"/>
-  </ds:schemaRefs>
-</ds:datastoreItem>
-</file>
-
 <file path=customXml/itemProps3.xml><?xml version="1.0" encoding="utf-8"?>
 <ds:datastoreItem xmlns:ds="http://schemas.openxmlformats.org/officeDocument/2006/customXml" ds:itemID="{529E81E1-445C-4E91-8E35-C5BD736A3B77}">
   <ds:schemaRefs>

--- a/e61 Projects/Presentations/Discusant RBA Housing TTPI 2026.pptx
+++ b/e61 Projects/Presentations/Discusant RBA Housing TTPI 2026.pptx
@@ -19,7 +19,7 @@
     <p:sldId id="2147140431" r:id="rId10"/>
   </p:sldIdLst>
   <p:sldSz cx="12192000" cy="6858000"/>
-  <p:notesSz cx="6858000" cy="9144000"/>
+  <p:notesSz cx="7099300" cy="9385300"/>
   <p:custDataLst>
     <p:tags r:id="rId13"/>
   </p:custDataLst>
@@ -192,14 +192,14 @@
         <p:spPr>
           <a:xfrm>
             <a:off x="0" y="0"/>
-            <a:ext cx="2971800" cy="458788"/>
-          </a:xfrm>
-          <a:prstGeom prst="rect">
-            <a:avLst/>
-          </a:prstGeom>
-        </p:spPr>
-        <p:txBody>
-          <a:bodyPr vert="horz" lIns="91440" tIns="45720" rIns="91440" bIns="45720" rtlCol="0"/>
+            <a:ext cx="3076363" cy="470895"/>
+          </a:xfrm>
+          <a:prstGeom prst="rect">
+            <a:avLst/>
+          </a:prstGeom>
+        </p:spPr>
+        <p:txBody>
+          <a:bodyPr vert="horz" lIns="94192" tIns="47096" rIns="94192" bIns="47096" rtlCol="0"/>
           <a:lstStyle>
             <a:lvl1pPr algn="l">
               <a:defRPr sz="1200"/>
@@ -228,15 +228,15 @@
         </p:nvSpPr>
         <p:spPr>
           <a:xfrm>
-            <a:off x="3884613" y="0"/>
-            <a:ext cx="2971800" cy="458788"/>
-          </a:xfrm>
-          <a:prstGeom prst="rect">
-            <a:avLst/>
-          </a:prstGeom>
-        </p:spPr>
-        <p:txBody>
-          <a:bodyPr vert="horz" lIns="91440" tIns="45720" rIns="91440" bIns="45720" rtlCol="0"/>
+            <a:off x="4021294" y="0"/>
+            <a:ext cx="3076363" cy="470895"/>
+          </a:xfrm>
+          <a:prstGeom prst="rect">
+            <a:avLst/>
+          </a:prstGeom>
+        </p:spPr>
+        <p:txBody>
+          <a:bodyPr vert="horz" lIns="94192" tIns="47096" rIns="94192" bIns="47096" rtlCol="0"/>
           <a:lstStyle>
             <a:lvl1pPr algn="r">
               <a:defRPr sz="1200"/>
@@ -245,7 +245,7 @@
           <a:p>
             <a:fld id="{60F87968-E7C3-4FA2-86D7-7CFDDCA2896A}" type="datetimeFigureOut">
               <a:rPr lang="en-US" smtClean="0"/>
-              <a:t>7/28/2026</a:t>
+              <a:t>29-Jul-26</a:t>
             </a:fld>
             <a:endParaRPr lang="en-US"/>
           </a:p>
@@ -269,15 +269,15 @@
         </p:nvSpPr>
         <p:spPr>
           <a:xfrm>
-            <a:off x="0" y="8685213"/>
-            <a:ext cx="2971800" cy="458787"/>
-          </a:xfrm>
-          <a:prstGeom prst="rect">
-            <a:avLst/>
-          </a:prstGeom>
-        </p:spPr>
-        <p:txBody>
-          <a:bodyPr vert="horz" lIns="91440" tIns="45720" rIns="91440" bIns="45720" rtlCol="0" anchor="b"/>
+            <a:off x="0" y="8914407"/>
+            <a:ext cx="3076363" cy="470894"/>
+          </a:xfrm>
+          <a:prstGeom prst="rect">
+            <a:avLst/>
+          </a:prstGeom>
+        </p:spPr>
+        <p:txBody>
+          <a:bodyPr vert="horz" lIns="94192" tIns="47096" rIns="94192" bIns="47096" rtlCol="0" anchor="b"/>
           <a:lstStyle>
             <a:lvl1pPr algn="l">
               <a:defRPr sz="1200"/>
@@ -306,15 +306,15 @@
         </p:nvSpPr>
         <p:spPr>
           <a:xfrm>
-            <a:off x="3884613" y="8685213"/>
-            <a:ext cx="2971800" cy="458787"/>
-          </a:xfrm>
-          <a:prstGeom prst="rect">
-            <a:avLst/>
-          </a:prstGeom>
-        </p:spPr>
-        <p:txBody>
-          <a:bodyPr vert="horz" lIns="91440" tIns="45720" rIns="91440" bIns="45720" rtlCol="0" anchor="b"/>
+            <a:off x="4021294" y="8914407"/>
+            <a:ext cx="3076363" cy="470894"/>
+          </a:xfrm>
+          <a:prstGeom prst="rect">
+            <a:avLst/>
+          </a:prstGeom>
+        </p:spPr>
+        <p:txBody>
+          <a:bodyPr vert="horz" lIns="94192" tIns="47096" rIns="94192" bIns="47096" rtlCol="0" anchor="b"/>
           <a:lstStyle>
             <a:lvl1pPr algn="r">
               <a:defRPr sz="1200"/>
@@ -375,14 +375,14 @@
         <p:spPr>
           <a:xfrm>
             <a:off x="0" y="0"/>
-            <a:ext cx="2971800" cy="458788"/>
-          </a:xfrm>
-          <a:prstGeom prst="rect">
-            <a:avLst/>
-          </a:prstGeom>
-        </p:spPr>
-        <p:txBody>
-          <a:bodyPr vert="horz" lIns="91440" tIns="45720" rIns="91440" bIns="45720" rtlCol="0"/>
+            <a:ext cx="3076363" cy="470895"/>
+          </a:xfrm>
+          <a:prstGeom prst="rect">
+            <a:avLst/>
+          </a:prstGeom>
+        </p:spPr>
+        <p:txBody>
+          <a:bodyPr vert="horz" lIns="94192" tIns="47096" rIns="94192" bIns="47096" rtlCol="0"/>
           <a:lstStyle>
             <a:lvl1pPr algn="l">
               <a:defRPr sz="1200"/>
@@ -405,15 +405,15 @@
         </p:nvSpPr>
         <p:spPr>
           <a:xfrm>
-            <a:off x="3884613" y="0"/>
-            <a:ext cx="2971800" cy="458788"/>
-          </a:xfrm>
-          <a:prstGeom prst="rect">
-            <a:avLst/>
-          </a:prstGeom>
-        </p:spPr>
-        <p:txBody>
-          <a:bodyPr vert="horz" lIns="91440" tIns="45720" rIns="91440" bIns="45720" rtlCol="0"/>
+            <a:off x="4021294" y="0"/>
+            <a:ext cx="3076363" cy="470895"/>
+          </a:xfrm>
+          <a:prstGeom prst="rect">
+            <a:avLst/>
+          </a:prstGeom>
+        </p:spPr>
+        <p:txBody>
+          <a:bodyPr vert="horz" lIns="94192" tIns="47096" rIns="94192" bIns="47096" rtlCol="0"/>
           <a:lstStyle>
             <a:lvl1pPr algn="r">
               <a:defRPr sz="1200"/>
@@ -422,7 +422,7 @@
           <a:p>
             <a:fld id="{B416A7BE-E113-476D-8DE0-A6138461ACE1}" type="datetimeFigureOut">
               <a:rPr lang="en-US" smtClean="0"/>
-              <a:t>7/28/2026</a:t>
+              <a:t>29-Jul-26</a:t>
             </a:fld>
             <a:endParaRPr lang="en-US"/>
           </a:p>
@@ -440,8 +440,8 @@
         </p:nvSpPr>
         <p:spPr>
           <a:xfrm>
-            <a:off x="685800" y="1143000"/>
-            <a:ext cx="5486400" cy="3086100"/>
+            <a:off x="735013" y="1173163"/>
+            <a:ext cx="5629275" cy="3167062"/>
           </a:xfrm>
           <a:prstGeom prst="rect">
             <a:avLst/>
@@ -454,7 +454,7 @@
           </a:ln>
         </p:spPr>
         <p:txBody>
-          <a:bodyPr vert="horz" lIns="91440" tIns="45720" rIns="91440" bIns="45720" rtlCol="0" anchor="ctr"/>
+          <a:bodyPr vert="horz" lIns="94192" tIns="47096" rIns="94192" bIns="47096" rtlCol="0" anchor="ctr"/>
           <a:lstStyle/>
           <a:p>
             <a:endParaRPr lang="en-US"/>
@@ -473,15 +473,15 @@
         </p:nvSpPr>
         <p:spPr>
           <a:xfrm>
-            <a:off x="685800" y="4400550"/>
-            <a:ext cx="5486400" cy="3600450"/>
-          </a:xfrm>
-          <a:prstGeom prst="rect">
-            <a:avLst/>
-          </a:prstGeom>
-        </p:spPr>
-        <p:txBody>
-          <a:bodyPr vert="horz" lIns="91440" tIns="45720" rIns="91440" bIns="45720" rtlCol="0"/>
+            <a:off x="709930" y="4516676"/>
+            <a:ext cx="5679440" cy="3695462"/>
+          </a:xfrm>
+          <a:prstGeom prst="rect">
+            <a:avLst/>
+          </a:prstGeom>
+        </p:spPr>
+        <p:txBody>
+          <a:bodyPr vert="horz" lIns="94192" tIns="47096" rIns="94192" bIns="47096" rtlCol="0"/>
           <a:lstStyle/>
           <a:p>
             <a:pPr lvl="0"/>
@@ -532,15 +532,15 @@
         </p:nvSpPr>
         <p:spPr>
           <a:xfrm>
-            <a:off x="0" y="8685213"/>
-            <a:ext cx="2971800" cy="458787"/>
-          </a:xfrm>
-          <a:prstGeom prst="rect">
-            <a:avLst/>
-          </a:prstGeom>
-        </p:spPr>
-        <p:txBody>
-          <a:bodyPr vert="horz" lIns="91440" tIns="45720" rIns="91440" bIns="45720" rtlCol="0" anchor="b"/>
+            <a:off x="0" y="8914407"/>
+            <a:ext cx="3076363" cy="470894"/>
+          </a:xfrm>
+          <a:prstGeom prst="rect">
+            <a:avLst/>
+          </a:prstGeom>
+        </p:spPr>
+        <p:txBody>
+          <a:bodyPr vert="horz" lIns="94192" tIns="47096" rIns="94192" bIns="47096" rtlCol="0" anchor="b"/>
           <a:lstStyle>
             <a:lvl1pPr algn="l">
               <a:defRPr sz="1200"/>
@@ -563,15 +563,15 @@
         </p:nvSpPr>
         <p:spPr>
           <a:xfrm>
-            <a:off x="3884613" y="8685213"/>
-            <a:ext cx="2971800" cy="458787"/>
-          </a:xfrm>
-          <a:prstGeom prst="rect">
-            <a:avLst/>
-          </a:prstGeom>
-        </p:spPr>
-        <p:txBody>
-          <a:bodyPr vert="horz" lIns="91440" tIns="45720" rIns="91440" bIns="45720" rtlCol="0" anchor="b"/>
+            <a:off x="4021294" y="8914407"/>
+            <a:ext cx="3076363" cy="470894"/>
+          </a:xfrm>
+          <a:prstGeom prst="rect">
+            <a:avLst/>
+          </a:prstGeom>
+        </p:spPr>
+        <p:txBody>
+          <a:bodyPr vert="horz" lIns="94192" tIns="47096" rIns="94192" bIns="47096" rtlCol="0" anchor="b"/>
           <a:lstStyle>
             <a:lvl1pPr algn="r">
               <a:defRPr sz="1200"/>
@@ -20036,36 +20036,24 @@
             <p:ph type="ctrTitle"/>
           </p:nvPr>
         </p:nvSpPr>
-        <p:spPr/>
+        <p:spPr>
+          <a:xfrm>
+            <a:off x="1149093" y="805544"/>
+            <a:ext cx="10106736" cy="3429000"/>
+          </a:xfrm>
+        </p:spPr>
         <p:txBody>
           <a:bodyPr/>
           <a:lstStyle/>
           <a:p>
-            <a:endParaRPr lang="en-AU" dirty="0"/>
-          </a:p>
-        </p:txBody>
-      </p:sp>
-      <p:sp>
-        <p:nvSpPr>
-          <p:cNvPr id="8" name="Subtitle 7">
-            <a:extLst>
-              <a:ext uri="{FF2B5EF4-FFF2-40B4-BE49-F238E27FC236}">
-                <a16:creationId xmlns:a16="http://schemas.microsoft.com/office/drawing/2014/main" id="{8BAD583D-414C-8D2B-DA03-8F81A23522E2}"/>
-              </a:ext>
-            </a:extLst>
-          </p:cNvPr>
-          <p:cNvSpPr>
-            <a:spLocks noGrp="1"/>
-          </p:cNvSpPr>
-          <p:nvPr>
-            <p:ph type="subTitle" idx="1"/>
-          </p:nvPr>
-        </p:nvSpPr>
-        <p:spPr/>
-        <p:txBody>
-          <a:bodyPr/>
-          <a:lstStyle/>
-          <a:p>
+            <a:r>
+              <a:rPr lang="en-AU" dirty="0"/>
+              <a:t>Discussion: </a:t>
+            </a:r>
+            <a:r>
+              <a:rPr lang="en-US" dirty="0"/>
+              <a:t>Insights From New Data on Australian Housing Investors</a:t>
+            </a:r>
             <a:endParaRPr lang="en-AU" dirty="0"/>
           </a:p>
         </p:txBody>
@@ -20360,12 +20348,12 @@
           </a:bodyPr>
           <a:lstStyle/>
           <a:p>
-            <a:pPr marL="285750" indent="-285750">
+            <a:pPr marL="342900" indent="-342900">
               <a:spcAft>
                 <a:spcPts val="600"/>
               </a:spcAft>
-              <a:buFont typeface="Arial" panose="020B0604020202020204" pitchFamily="34" charset="0"/>
-              <a:buChar char="•"/>
+              <a:buFont typeface="+mj-lt"/>
+              <a:buAutoNum type="arabicPeriod"/>
             </a:pPr>
             <a:r>
               <a:rPr lang="en-AU" sz="1600" dirty="0">
@@ -20379,12 +20367,12 @@
             </a:r>
           </a:p>
           <a:p>
-            <a:pPr marL="285750" indent="-285750">
+            <a:pPr marL="342900" indent="-342900">
               <a:spcAft>
                 <a:spcPts val="600"/>
               </a:spcAft>
-              <a:buFont typeface="Arial" panose="020B0604020202020204" pitchFamily="34" charset="0"/>
-              <a:buChar char="•"/>
+              <a:buFont typeface="+mj-lt"/>
+              <a:buAutoNum type="arabicPeriod"/>
             </a:pPr>
             <a:r>
               <a:rPr lang="en-AU" sz="1600" dirty="0">
@@ -20398,12 +20386,12 @@
             </a:r>
           </a:p>
           <a:p>
-            <a:pPr marL="285750" indent="-285750">
+            <a:pPr marL="342900" indent="-342900">
               <a:spcAft>
                 <a:spcPts val="600"/>
               </a:spcAft>
-              <a:buFont typeface="Arial" panose="020B0604020202020204" pitchFamily="34" charset="0"/>
-              <a:buChar char="•"/>
+              <a:buFont typeface="+mj-lt"/>
+              <a:buAutoNum type="arabicPeriod"/>
             </a:pPr>
             <a:r>
               <a:rPr lang="en-AU" sz="1600" dirty="0">
@@ -20417,12 +20405,12 @@
             </a:r>
           </a:p>
           <a:p>
-            <a:pPr marL="285750" indent="-285750">
+            <a:pPr marL="342900" indent="-342900">
               <a:spcAft>
                 <a:spcPts val="600"/>
               </a:spcAft>
-              <a:buFont typeface="Arial" panose="020B0604020202020204" pitchFamily="34" charset="0"/>
-              <a:buChar char="•"/>
+              <a:buFont typeface="+mj-lt"/>
+              <a:buAutoNum type="arabicPeriod"/>
             </a:pPr>
             <a:r>
               <a:rPr lang="en-AU" sz="1600" dirty="0">
@@ -20436,12 +20424,12 @@
             </a:r>
           </a:p>
           <a:p>
-            <a:pPr marL="285750" indent="-285750">
+            <a:pPr marL="342900" indent="-342900">
               <a:spcAft>
                 <a:spcPts val="600"/>
               </a:spcAft>
-              <a:buFont typeface="Arial" panose="020B0604020202020204" pitchFamily="34" charset="0"/>
-              <a:buChar char="•"/>
+              <a:buFont typeface="+mj-lt"/>
+              <a:buAutoNum type="arabicPeriod"/>
             </a:pPr>
             <a:r>
               <a:rPr lang="en-AU" sz="1600" dirty="0">
@@ -20455,12 +20443,12 @@
             </a:r>
           </a:p>
           <a:p>
-            <a:pPr marL="285750" indent="-285750">
+            <a:pPr marL="342900" indent="-342900">
               <a:spcAft>
                 <a:spcPts val="600"/>
               </a:spcAft>
-              <a:buFont typeface="Arial" panose="020B0604020202020204" pitchFamily="34" charset="0"/>
-              <a:buChar char="•"/>
+              <a:buFont typeface="+mj-lt"/>
+              <a:buAutoNum type="arabicPeriod"/>
             </a:pPr>
             <a:r>
               <a:rPr lang="en-AU" sz="1600" dirty="0">
@@ -20474,12 +20462,12 @@
             </a:r>
           </a:p>
           <a:p>
-            <a:pPr marL="285750" indent="-285750">
+            <a:pPr marL="342900" indent="-342900">
               <a:spcAft>
                 <a:spcPts val="600"/>
               </a:spcAft>
-              <a:buFont typeface="Arial" panose="020B0604020202020204" pitchFamily="34" charset="0"/>
-              <a:buChar char="•"/>
+              <a:buFont typeface="+mj-lt"/>
+              <a:buAutoNum type="arabicPeriod"/>
             </a:pPr>
             <a:r>
               <a:rPr lang="en-AU" sz="1600" dirty="0">
@@ -21071,7 +21059,7 @@
         <p:spPr>
           <a:xfrm>
             <a:off x="370417" y="1915554"/>
-            <a:ext cx="10903190" cy="723275"/>
+            <a:ext cx="10903190" cy="1077218"/>
           </a:xfrm>
           <a:prstGeom prst="rect">
             <a:avLst/>
@@ -21083,6 +21071,32 @@
             <a:spAutoFit/>
           </a:bodyPr>
           <a:lstStyle/>
+          <a:p>
+            <a:pPr marL="285750" indent="-285750">
+              <a:spcAft>
+                <a:spcPts val="600"/>
+              </a:spcAft>
+              <a:buFont typeface="Arial" panose="020B0604020202020204" pitchFamily="34" charset="0"/>
+              <a:buChar char="•"/>
+            </a:pPr>
+            <a:r>
+              <a:rPr lang="en-AU" dirty="0"/>
+              <a:t>Highlighting the joint factors that explain default risk.</a:t>
+            </a:r>
+          </a:p>
+          <a:p>
+            <a:pPr marL="285750" indent="-285750">
+              <a:spcAft>
+                <a:spcPts val="600"/>
+              </a:spcAft>
+              <a:buFont typeface="Arial" panose="020B0604020202020204" pitchFamily="34" charset="0"/>
+              <a:buChar char="•"/>
+            </a:pPr>
+            <a:r>
+              <a:rPr lang="en-AU" dirty="0"/>
+              <a:t>Likely, more richly describing the joint distribution of factors.</a:t>
+            </a:r>
+          </a:p>
           <a:p>
             <a:pPr marL="285750" indent="-285750">
               <a:spcAft>
@@ -21094,19 +21108,6 @@
             <a:r>
               <a:rPr lang="en-AU" dirty="0"/>
               <a:t>Simulating responses to adverse shocks.</a:t>
-            </a:r>
-          </a:p>
-          <a:p>
-            <a:pPr marL="285750" indent="-285750">
-              <a:spcAft>
-                <a:spcPts val="600"/>
-              </a:spcAft>
-              <a:buFont typeface="Arial" panose="020B0604020202020204" pitchFamily="34" charset="0"/>
-              <a:buChar char="•"/>
-            </a:pPr>
-            <a:r>
-              <a:rPr lang="en-AU" dirty="0"/>
-              <a:t>Likely, more richly describing the joint distribution of factors.</a:t>
             </a:r>
           </a:p>
         </p:txBody>
@@ -21767,10 +21768,10 @@
       </p:sp>
       <p:pic>
         <p:nvPicPr>
-          <p:cNvPr id="13" name="Picture 12">
-            <a:extLst>
-              <a:ext uri="{FF2B5EF4-FFF2-40B4-BE49-F238E27FC236}">
-                <a16:creationId xmlns:a16="http://schemas.microsoft.com/office/drawing/2014/main" id="{F05D41E7-EA4B-3814-D89D-AE7029CC9559}"/>
+          <p:cNvPr id="7" name="Picture 6">
+            <a:extLst>
+              <a:ext uri="{FF2B5EF4-FFF2-40B4-BE49-F238E27FC236}">
+                <a16:creationId xmlns:a16="http://schemas.microsoft.com/office/drawing/2014/main" id="{8DD4A2A8-EA86-14EF-BF47-1DD6F69B0C74}"/>
               </a:ext>
             </a:extLst>
           </p:cNvPr>
@@ -21793,8 +21794,8 @@
         </p:blipFill>
         <p:spPr>
           <a:xfrm>
-            <a:off x="5795802" y="2829562"/>
-            <a:ext cx="5151120" cy="3571444"/>
+            <a:off x="6096000" y="2617184"/>
+            <a:ext cx="4583740" cy="4221866"/>
           </a:xfrm>
           <a:prstGeom prst="rect">
             <a:avLst/>
@@ -21989,7 +21990,7 @@
                                           </p:stCondLst>
                                         </p:cTn>
                                         <p:tgtEl>
-                                          <p:spTgt spid="13"/>
+                                          <p:spTgt spid="7"/>
                                         </p:tgtEl>
                                         <p:attrNameLst>
                                           <p:attrName>style.visibility</p:attrName>
@@ -24668,6 +24669,15 @@
 </file>
 
 <file path=customXml/item2.xml><?xml version="1.0" encoding="utf-8"?>
+<?mso-contentType ?>
+<FormTemplates xmlns="http://schemas.microsoft.com/sharepoint/v3/contenttype/forms">
+  <Display>DocumentLibraryForm</Display>
+  <Edit>DocumentLibraryForm</Edit>
+  <New>DocumentLibraryForm</New>
+</FormTemplates>
+</file>
+
+<file path=customXml/item3.xml><?xml version="1.0" encoding="utf-8"?>
 <ct:contentTypeSchema xmlns:ct="http://schemas.microsoft.com/office/2006/metadata/contentType" xmlns:ma="http://schemas.microsoft.com/office/2006/metadata/properties/metaAttributes" ct:_="" ma:_="" ma:contentTypeName="Document" ma:contentTypeID="0x010100E38A1619F266734FBC2B48FB95398739" ma:contentTypeVersion="18" ma:contentTypeDescription="Create a new document." ma:contentTypeScope="" ma:versionID="8dc4163b27f0ec44a22c6d7358323f5f">
   <xsd:schema xmlns:xsd="http://www.w3.org/2001/XMLSchema" xmlns:xs="http://www.w3.org/2001/XMLSchema" xmlns:p="http://schemas.microsoft.com/office/2006/metadata/properties" xmlns:ns2="aa802c90-64f7-4260-a678-c5c09559402a" xmlns:ns3="d4025935-85eb-43e8-ab32-734675053e7f" targetNamespace="http://schemas.microsoft.com/office/2006/metadata/properties" ma:root="true" ma:fieldsID="a1176a965c39d1ac1c7d6ef690b32559" ns2:_="" ns3:_="">
     <xsd:import namespace="aa802c90-64f7-4260-a678-c5c09559402a"/>
@@ -24922,33 +24932,32 @@
 </ct:contentTypeSchema>
 </file>
 
-<file path=customXml/item3.xml><?xml version="1.0" encoding="utf-8"?>
-<?mso-contentType ?>
-<FormTemplates xmlns="http://schemas.microsoft.com/sharepoint/v3/contenttype/forms">
-  <Display>DocumentLibraryForm</Display>
-  <Edit>DocumentLibraryForm</Edit>
-  <New>DocumentLibraryForm</New>
-</FormTemplates>
-</file>
-
 <file path=customXml/itemProps1.xml><?xml version="1.0" encoding="utf-8"?>
 <ds:datastoreItem xmlns:ds="http://schemas.openxmlformats.org/officeDocument/2006/customXml" ds:itemID="{8E36B762-179B-48EA-90B2-E74079BA15DE}">
   <ds:schemaRefs>
+    <ds:schemaRef ds:uri="http://purl.org/dc/elements/1.1/"/>
+    <ds:schemaRef ds:uri="aa802c90-64f7-4260-a678-c5c09559402a"/>
+    <ds:schemaRef ds:uri="d4025935-85eb-43e8-ab32-734675053e7f"/>
+    <ds:schemaRef ds:uri="http://schemas.microsoft.com/office/infopath/2007/PartnerControls"/>
     <ds:schemaRef ds:uri="http://schemas.microsoft.com/office/2006/documentManagement/types"/>
+    <ds:schemaRef ds:uri="http://purl.org/dc/dcmitype/"/>
+    <ds:schemaRef ds:uri="http://www.w3.org/XML/1998/namespace"/>
+    <ds:schemaRef ds:uri="http://purl.org/dc/terms/"/>
     <ds:schemaRef ds:uri="http://schemas.openxmlformats.org/package/2006/metadata/core-properties"/>
-    <ds:schemaRef ds:uri="http://purl.org/dc/terms/"/>
-    <ds:schemaRef ds:uri="aa802c90-64f7-4260-a678-c5c09559402a"/>
-    <ds:schemaRef ds:uri="http://purl.org/dc/elements/1.1/"/>
     <ds:schemaRef ds:uri="http://schemas.microsoft.com/office/2006/metadata/properties"/>
-    <ds:schemaRef ds:uri="http://www.w3.org/XML/1998/namespace"/>
-    <ds:schemaRef ds:uri="http://schemas.microsoft.com/office/infopath/2007/PartnerControls"/>
-    <ds:schemaRef ds:uri="d4025935-85eb-43e8-ab32-734675053e7f"/>
-    <ds:schemaRef ds:uri="http://purl.org/dc/dcmitype/"/>
   </ds:schemaRefs>
 </ds:datastoreItem>
 </file>
 
 <file path=customXml/itemProps2.xml><?xml version="1.0" encoding="utf-8"?>
+<ds:datastoreItem xmlns:ds="http://schemas.openxmlformats.org/officeDocument/2006/customXml" ds:itemID="{529E81E1-445C-4E91-8E35-C5BD736A3B77}">
+  <ds:schemaRefs>
+    <ds:schemaRef ds:uri="http://schemas.microsoft.com/sharepoint/v3/contenttype/forms"/>
+  </ds:schemaRefs>
+</ds:datastoreItem>
+</file>
+
+<file path=customXml/itemProps3.xml><?xml version="1.0" encoding="utf-8"?>
 <ds:datastoreItem xmlns:ds="http://schemas.openxmlformats.org/officeDocument/2006/customXml" ds:itemID="{C54E5144-405F-49D2-89C0-6C01A508B471}">
   <ds:schemaRefs>
     <ds:schemaRef ds:uri="http://schemas.microsoft.com/office/2006/metadata/contentType"/>
@@ -24965,12 +24974,4 @@
     <ds:schemaRef ds:uri="http://schemas.microsoft.com/internal/obd"/>
   </ds:schemaRefs>
 </ds:datastoreItem>
-</file>
-
-<file path=customXml/itemProps3.xml><?xml version="1.0" encoding="utf-8"?>
-<ds:datastoreItem xmlns:ds="http://schemas.openxmlformats.org/officeDocument/2006/customXml" ds:itemID="{529E81E1-445C-4E91-8E35-C5BD736A3B77}">
-  <ds:schemaRefs>
-    <ds:schemaRef ds:uri="http://schemas.microsoft.com/sharepoint/v3/contenttype/forms"/>
-  </ds:schemaRefs>
-</ds:datastoreItem>
 </file>